--- a/templates/carousels/field-notes.pptx
+++ b/templates/carousels/field-notes.pptx
@@ -4775,7 +4775,7 @@
           <a:p>
             <a:pPr algn="r"/>
             <a:r>
-              <a:rPr sz="1950" b="1" i="0">
+              <a:rPr sz="3000" b="1" i="0">
                 <a:solidFill>
                   <a:srgbClr val="156826"/>
                 </a:solidFill>
@@ -4787,7 +4787,7 @@
           <a:p>
             <a:pPr algn="r"/>
             <a:r>
-              <a:rPr sz="1950" b="1" i="0">
+              <a:rPr sz="3000" b="1" i="0">
                 <a:solidFill>
                   <a:srgbClr val="156826"/>
                 </a:solidFill>
@@ -4807,7 +4807,7 @@
         <p:spPr>
           <a:xfrm>
             <a:off x="1238250" y="571500"/>
-            <a:ext cx="3810000" cy="381000"/>
+            <a:ext cx="8096250" cy="381000"/>
           </a:xfrm>
           <a:prstGeom prst="rect">
             <a:avLst/>
@@ -4822,7 +4822,7 @@
           <a:p>
             <a:pPr algn="l"/>
             <a:r>
-              <a:rPr sz="2250" b="1" i="0">
+              <a:rPr sz="3000" b="1" i="0">
                 <a:solidFill>
                   <a:srgbClr val="156826"/>
                 </a:solidFill>
@@ -4861,7 +4861,7 @@
               </a:lnSpc>
             </a:pPr>
             <a:r>
-              <a:rPr sz="4950" b="1" i="0">
+              <a:rPr sz="5700" b="1" i="0">
                 <a:solidFill>
                   <a:srgbClr val="22371F"/>
                 </a:solidFill>
@@ -4896,7 +4896,7 @@
           <a:p>
             <a:pPr algn="l"/>
             <a:r>
-              <a:rPr sz="3450" b="0" i="1">
+              <a:rPr sz="5700" b="0" i="1">
                 <a:solidFill>
                   <a:srgbClr val="156826"/>
                 </a:solidFill>
@@ -4908,7 +4908,7 @@
           <a:p>
             <a:pPr algn="l"/>
             <a:r>
-              <a:rPr sz="3450" b="0" i="1">
+              <a:rPr sz="5700" b="0" i="1">
                 <a:solidFill>
                   <a:srgbClr val="156826"/>
                 </a:solidFill>
@@ -6113,7 +6113,7 @@
           <a:p>
             <a:pPr algn="r"/>
             <a:r>
-              <a:rPr sz="1950" b="1" i="0">
+              <a:rPr sz="3000" b="1" i="0">
                 <a:solidFill>
                   <a:srgbClr val="156826"/>
                 </a:solidFill>
@@ -6125,7 +6125,7 @@
           <a:p>
             <a:pPr algn="r"/>
             <a:r>
-              <a:rPr sz="1950" b="1" i="0">
+              <a:rPr sz="3000" b="1" i="0">
                 <a:solidFill>
                   <a:srgbClr val="156826"/>
                 </a:solidFill>
@@ -6145,7 +6145,7 @@
         <p:spPr>
           <a:xfrm>
             <a:off x="1238250" y="571500"/>
-            <a:ext cx="3810000" cy="381000"/>
+            <a:ext cx="8096250" cy="381000"/>
           </a:xfrm>
           <a:prstGeom prst="rect">
             <a:avLst/>
@@ -6160,7 +6160,7 @@
           <a:p>
             <a:pPr algn="l"/>
             <a:r>
-              <a:rPr sz="2250" b="1" i="0">
+              <a:rPr sz="3000" b="1" i="0">
                 <a:solidFill>
                   <a:srgbClr val="156826"/>
                 </a:solidFill>
@@ -6199,13 +6199,13 @@
               </a:lnSpc>
             </a:pPr>
             <a:r>
-              <a:rPr sz="4800" b="0" i="0">
+              <a:rPr sz="5700" b="0" i="0">
                 <a:solidFill>
                   <a:srgbClr val="22371F"/>
                 </a:solidFill>
                 <a:latin typeface="EB Garamond"/>
               </a:rPr>
-              <a:t>[COPY: Allison] The one question they tested, as a question. Use the graduate's own hypothesis.</a:t>
+              <a:t>[COPY: Allison] The question they tested.</a:t>
             </a:r>
           </a:p>
         </p:txBody>
@@ -7404,7 +7404,7 @@
           <a:p>
             <a:pPr algn="r"/>
             <a:r>
-              <a:rPr sz="1950" b="1" i="0">
+              <a:rPr sz="3000" b="1" i="0">
                 <a:solidFill>
                   <a:srgbClr val="156826"/>
                 </a:solidFill>
@@ -7416,7 +7416,7 @@
           <a:p>
             <a:pPr algn="r"/>
             <a:r>
-              <a:rPr sz="1950" b="1" i="0">
+              <a:rPr sz="3000" b="1" i="0">
                 <a:solidFill>
                   <a:srgbClr val="156826"/>
                 </a:solidFill>
@@ -7436,7 +7436,7 @@
         <p:spPr>
           <a:xfrm>
             <a:off x="1238250" y="571500"/>
-            <a:ext cx="3810000" cy="381000"/>
+            <a:ext cx="8096250" cy="381000"/>
           </a:xfrm>
           <a:prstGeom prst="rect">
             <a:avLst/>
@@ -7451,7 +7451,7 @@
           <a:p>
             <a:pPr algn="l"/>
             <a:r>
-              <a:rPr sz="2250" b="1" i="0">
+              <a:rPr sz="3000" b="1" i="0">
                 <a:solidFill>
                   <a:srgbClr val="156826"/>
                 </a:solidFill>
@@ -7525,13 +7525,13 @@
               </a:lnSpc>
             </a:pPr>
             <a:r>
-              <a:rPr sz="3750" b="0" i="0">
+              <a:rPr sz="5700" b="0" i="0">
                 <a:solidFill>
                   <a:srgbClr val="22371F"/>
                 </a:solidFill>
                 <a:latin typeface="EB Garamond"/>
               </a:rPr>
-              <a:t>[COPY: Allison] Line 1: the plots and what each one got.</a:t>
+              <a:t>[COPY: Allison] Line 1: the plots.</a:t>
             </a:r>
           </a:p>
         </p:txBody>
@@ -7599,13 +7599,13 @@
               </a:lnSpc>
             </a:pPr>
             <a:r>
-              <a:rPr sz="3750" b="0" i="0">
+              <a:rPr sz="5700" b="0" i="0">
                 <a:solidFill>
                   <a:srgbClr val="22371F"/>
                 </a:solidFill>
                 <a:latin typeface="EB Garamond"/>
               </a:rPr>
-              <a:t>[COPY: Allison] Line 2: the control, named.</a:t>
+              <a:t>[COPY: Allison] Line 2: the control.</a:t>
             </a:r>
           </a:p>
         </p:txBody>
@@ -7673,13 +7673,13 @@
               </a:lnSpc>
             </a:pPr>
             <a:r>
-              <a:rPr sz="3750" b="0" i="0">
+              <a:rPr sz="5700" b="0" i="0">
                 <a:solidFill>
                   <a:srgbClr val="22371F"/>
                 </a:solidFill>
                 <a:latin typeface="EB Garamond"/>
               </a:rPr>
-              <a:t>[COPY: Allison] Line 3: what was measured, and when.</a:t>
+              <a:t>[COPY: Allison] Line 3: what was measured.</a:t>
             </a:r>
           </a:p>
         </p:txBody>
@@ -8878,7 +8878,7 @@
           <a:p>
             <a:pPr algn="r"/>
             <a:r>
-              <a:rPr sz="1950" b="1" i="0">
+              <a:rPr sz="3000" b="1" i="0">
                 <a:solidFill>
                   <a:srgbClr val="156826"/>
                 </a:solidFill>
@@ -8890,7 +8890,7 @@
           <a:p>
             <a:pPr algn="r"/>
             <a:r>
-              <a:rPr sz="1950" b="1" i="0">
+              <a:rPr sz="3000" b="1" i="0">
                 <a:solidFill>
                   <a:srgbClr val="156826"/>
                 </a:solidFill>
@@ -8910,7 +8910,7 @@
         <p:spPr>
           <a:xfrm>
             <a:off x="1238250" y="571500"/>
-            <a:ext cx="3810000" cy="381000"/>
+            <a:ext cx="8096250" cy="381000"/>
           </a:xfrm>
           <a:prstGeom prst="rect">
             <a:avLst/>
@@ -8925,7 +8925,7 @@
           <a:p>
             <a:pPr algn="l"/>
             <a:r>
-              <a:rPr sz="2250" b="1" i="0">
+              <a:rPr sz="3000" b="1" i="0">
                 <a:solidFill>
                   <a:srgbClr val="156826"/>
                 </a:solidFill>
@@ -8960,13 +8960,13 @@
           <a:p>
             <a:pPr algn="l"/>
             <a:r>
-              <a:rPr sz="1950" b="1" i="0">
+              <a:rPr sz="3000" b="1" i="0">
                 <a:solidFill>
                   <a:srgbClr val="156826"/>
                 </a:solidFill>
                 <a:latin typeface="Montserrat"/>
               </a:rPr>
-              <a:t>[COPY: Allison] Big number, from the source below.</a:t>
+              <a:t>[COPY: Allison] Big number</a:t>
             </a:r>
           </a:p>
         </p:txBody>
@@ -8980,7 +8980,7 @@
         <p:spPr>
           <a:xfrm>
             <a:off x="1238250" y="2286000"/>
-            <a:ext cx="8096250" cy="2190750"/>
+            <a:ext cx="8096250" cy="1905000"/>
           </a:xfrm>
           <a:prstGeom prst="rect">
             <a:avLst/>
@@ -8995,7 +8995,7 @@
           <a:p>
             <a:pPr algn="l"/>
             <a:r>
-              <a:rPr sz="9750" b="1" i="0">
+              <a:rPr sz="7500" b="1" i="0">
                 <a:solidFill>
                   <a:srgbClr val="156826"/>
                 </a:solidFill>
@@ -9014,8 +9014,8 @@
         </p:nvSpPr>
         <p:spPr>
           <a:xfrm>
-            <a:off x="1238250" y="4953000"/>
-            <a:ext cx="8096250" cy="1143000"/>
+            <a:off x="1238250" y="4476750"/>
+            <a:ext cx="8096250" cy="1524000"/>
           </a:xfrm>
           <a:prstGeom prst="rect">
             <a:avLst/>
@@ -9030,7 +9030,7 @@
           <a:p>
             <a:pPr algn="l"/>
             <a:r>
-              <a:rPr sz="3000" b="0" i="0">
+              <a:rPr sz="5700" b="0" i="0">
                 <a:solidFill>
                   <a:srgbClr val="22371F"/>
                 </a:solidFill>
@@ -9093,8 +9093,8 @@
         </p:nvSpPr>
         <p:spPr>
           <a:xfrm>
-            <a:off x="2190750" y="7810500"/>
-            <a:ext cx="2095500" cy="2476500"/>
+            <a:off x="2190750" y="8382000"/>
+            <a:ext cx="2095500" cy="1905000"/>
           </a:xfrm>
           <a:prstGeom prst="rect">
             <a:avLst/>
@@ -9137,8 +9137,8 @@
         </p:nvSpPr>
         <p:spPr>
           <a:xfrm>
-            <a:off x="5715000" y="5905500"/>
-            <a:ext cx="2095500" cy="4381500"/>
+            <a:off x="5715000" y="7048500"/>
+            <a:ext cx="2095500" cy="3238500"/>
           </a:xfrm>
           <a:prstGeom prst="rect">
             <a:avLst/>
@@ -9197,13 +9197,13 @@
           <a:p>
             <a:pPr algn="ctr"/>
             <a:r>
-              <a:rPr sz="2100" b="1" i="0">
+              <a:rPr sz="3000" b="1" i="0">
                 <a:solidFill>
                   <a:srgbClr val="22371F"/>
                 </a:solidFill>
                 <a:latin typeface="Montserrat"/>
               </a:rPr>
-              <a:t>[COPY: Allison] Control [value]</a:t>
+              <a:t>Control</a:t>
             </a:r>
           </a:p>
         </p:txBody>
@@ -9232,13 +9232,13 @@
           <a:p>
             <a:pPr algn="ctr"/>
             <a:r>
-              <a:rPr sz="2100" b="1" i="0">
+              <a:rPr sz="3000" b="1" i="0">
                 <a:solidFill>
                   <a:srgbClr val="22371F"/>
                 </a:solidFill>
                 <a:latin typeface="Montserrat"/>
               </a:rPr>
-              <a:t>[COPY: Allison] Trial [value]</a:t>
+              <a:t>Trial</a:t>
             </a:r>
           </a:p>
         </p:txBody>
@@ -9267,13 +9267,13 @@
           <a:p>
             <a:pPr algn="l"/>
             <a:r>
-              <a:rPr sz="1950" b="0" i="0">
+              <a:rPr sz="3000" b="0" i="0">
                 <a:solidFill>
                   <a:srgbClr val="6A665C"/>
                 </a:solidFill>
                 <a:latin typeface="Source Sans 3"/>
               </a:rPr>
-              <a:t>[COPY: Allison] Source line: who measured it, where, which year. No source, no number.</a:t>
+              <a:t>[COPY: Allison] Source: who, where, year.</a:t>
             </a:r>
           </a:p>
         </p:txBody>
@@ -10472,7 +10472,7 @@
           <a:p>
             <a:pPr algn="r"/>
             <a:r>
-              <a:rPr sz="1950" b="1" i="0">
+              <a:rPr sz="3000" b="1" i="0">
                 <a:solidFill>
                   <a:srgbClr val="156826"/>
                 </a:solidFill>
@@ -10484,7 +10484,7 @@
           <a:p>
             <a:pPr algn="r"/>
             <a:r>
-              <a:rPr sz="1950" b="1" i="0">
+              <a:rPr sz="3000" b="1" i="0">
                 <a:solidFill>
                   <a:srgbClr val="156826"/>
                 </a:solidFill>
@@ -10504,7 +10504,7 @@
         <p:spPr>
           <a:xfrm>
             <a:off x="1238250" y="571500"/>
-            <a:ext cx="3810000" cy="381000"/>
+            <a:ext cx="8096250" cy="381000"/>
           </a:xfrm>
           <a:prstGeom prst="rect">
             <a:avLst/>
@@ -10519,13 +10519,13 @@
           <a:p>
             <a:pPr algn="l"/>
             <a:r>
-              <a:rPr sz="2250" b="1" i="0">
+              <a:rPr sz="3000" b="1" i="0">
                 <a:solidFill>
                   <a:srgbClr val="156826"/>
                 </a:solidFill>
                 <a:latin typeface="Montserrat"/>
               </a:rPr>
-              <a:t>WHAT SURPRISED THEM</a:t>
+              <a:t>THE SURPRISE</a:t>
             </a:r>
           </a:p>
         </p:txBody>
@@ -10558,13 +10558,13 @@
               </a:lnSpc>
             </a:pPr>
             <a:r>
-              <a:rPr sz="4200" b="0" i="0">
+              <a:rPr sz="5700" b="0" i="0">
                 <a:solidFill>
                   <a:srgbClr val="22371F"/>
                 </a:solidFill>
                 <a:latin typeface="EB Garamond"/>
               </a:rPr>
-              <a:t>[COPY: Allison] What surprised them. Include what disappointed or failed: hail, pests, a plot that came out level. This slide is not optional.</a:t>
+              <a:t>[COPY: Allison] What surprised them, including what disappointed.</a:t>
             </a:r>
           </a:p>
         </p:txBody>
@@ -11763,7 +11763,7 @@
           <a:p>
             <a:pPr algn="r"/>
             <a:r>
-              <a:rPr sz="1950" b="1" i="0">
+              <a:rPr sz="3000" b="1" i="0">
                 <a:solidFill>
                   <a:srgbClr val="156826"/>
                 </a:solidFill>
@@ -11775,7 +11775,7 @@
           <a:p>
             <a:pPr algn="r"/>
             <a:r>
-              <a:rPr sz="1950" b="1" i="0">
+              <a:rPr sz="3000" b="1" i="0">
                 <a:solidFill>
                   <a:srgbClr val="156826"/>
                 </a:solidFill>
@@ -11795,7 +11795,7 @@
         <p:spPr>
           <a:xfrm>
             <a:off x="1238250" y="571500"/>
-            <a:ext cx="3810000" cy="381000"/>
+            <a:ext cx="8096250" cy="381000"/>
           </a:xfrm>
           <a:prstGeom prst="rect">
             <a:avLst/>
@@ -11810,7 +11810,7 @@
           <a:p>
             <a:pPr algn="l"/>
             <a:r>
-              <a:rPr sz="2250" b="1" i="0">
+              <a:rPr sz="3000" b="1" i="0">
                 <a:solidFill>
                   <a:srgbClr val="156826"/>
                 </a:solidFill>
@@ -11889,7 +11889,7 @@
           <a:p>
             <a:pPr algn="ctr"/>
             <a:r>
-              <a:rPr sz="1650" b="1" i="0">
+              <a:rPr sz="3000" b="1" i="0">
                 <a:solidFill>
                   <a:srgbClr val="22371F"/>
                 </a:solidFill>
@@ -11928,7 +11928,7 @@
               </a:lnSpc>
             </a:pPr>
             <a:r>
-              <a:rPr sz="4050" b="1" i="0">
+              <a:rPr sz="3750" b="1" i="0">
                 <a:solidFill>
                   <a:srgbClr val="22371F"/>
                 </a:solidFill>
@@ -11944,7 +11944,7 @@
               </a:lnSpc>
             </a:pPr>
             <a:r>
-              <a:rPr sz="4050" b="1" i="0">
+              <a:rPr sz="3750" b="1" i="0">
                 <a:solidFill>
                   <a:srgbClr val="22371F"/>
                 </a:solidFill>
@@ -11963,7 +11963,7 @@
         </p:nvSpPr>
         <p:spPr>
           <a:xfrm>
-            <a:off x="1238250" y="5905500"/>
+            <a:off x="1238250" y="6286500"/>
             <a:ext cx="8096250" cy="3810000"/>
           </a:xfrm>
           <a:prstGeom prst="rect">
@@ -11983,13 +11983,13 @@
               </a:lnSpc>
             </a:pPr>
             <a:r>
-              <a:rPr sz="3450" b="0" i="0">
+              <a:rPr sz="5700" b="0" i="0">
                 <a:solidFill>
                   <a:srgbClr val="22371F"/>
                 </a:solidFill>
                 <a:latin typeface="EB Garamond"/>
               </a:rPr>
-              <a:t>[COPY: Allison] One or two lines: their ground, their crop, their years growing. Link to the full report if it exists.</a:t>
+              <a:t>[COPY: Allison] Their ground, their crop, their years.</a:t>
             </a:r>
           </a:p>
         </p:txBody>
@@ -12018,7 +12018,7 @@
           <a:p>
             <a:pPr algn="l"/>
             <a:r>
-              <a:rPr sz="2100" b="1" i="0">
+              <a:rPr sz="3000" b="1" i="0">
                 <a:solidFill>
                   <a:srgbClr val="6A665C"/>
                 </a:solidFill>

--- a/templates/carousels/field-notes.pptx
+++ b/templates/carousels/field-notes.pptx
@@ -4919,9 +4919,33 @@
           </a:p>
         </p:txBody>
       </p:sp>
-      <p:sp>
-        <p:nvSpPr>
-          <p:cNvPr id="26" name="Oval 25"/>
+      <p:pic>
+        <p:nvPicPr>
+          <p:cNvPr id="26" name="Picture 25" descr="st9004932392259562121.png"/>
+          <p:cNvPicPr>
+            <a:picLocks noChangeAspect="1"/>
+          </p:cNvPicPr>
+          <p:nvPr/>
+        </p:nvPicPr>
+        <p:blipFill>
+          <a:blip r:embed="rId3"/>
+          <a:stretch>
+            <a:fillRect/>
+          </a:stretch>
+        </p:blipFill>
+        <p:spPr>
+          <a:xfrm rot="21120000">
+            <a:off x="5715000" y="8572500"/>
+            <a:ext cx="4419600" cy="3286125"/>
+          </a:xfrm>
+          <a:prstGeom prst="rect">
+            <a:avLst/>
+          </a:prstGeom>
+        </p:spPr>
+      </p:pic>
+      <p:sp>
+        <p:nvSpPr>
+          <p:cNvPr id="27" name="Oval 26"/>
           <p:cNvSpPr/>
           <p:nvPr/>
         </p:nvSpPr>
@@ -4965,7 +4989,7 @@
       </p:sp>
       <p:sp>
         <p:nvSpPr>
-          <p:cNvPr id="27" name="Oval 26"/>
+          <p:cNvPr id="28" name="Oval 27"/>
           <p:cNvSpPr/>
           <p:nvPr/>
         </p:nvSpPr>
@@ -5009,7 +5033,7 @@
       </p:sp>
       <p:sp>
         <p:nvSpPr>
-          <p:cNvPr id="28" name="Oval 27"/>
+          <p:cNvPr id="29" name="Oval 28"/>
           <p:cNvSpPr/>
           <p:nvPr/>
         </p:nvSpPr>
@@ -5053,7 +5077,7 @@
       </p:sp>
       <p:sp>
         <p:nvSpPr>
-          <p:cNvPr id="29" name="Oval 28"/>
+          <p:cNvPr id="30" name="Oval 29"/>
           <p:cNvSpPr/>
           <p:nvPr/>
         </p:nvSpPr>
@@ -5097,7 +5121,7 @@
       </p:sp>
       <p:sp>
         <p:nvSpPr>
-          <p:cNvPr id="30" name="Oval 29"/>
+          <p:cNvPr id="31" name="Oval 30"/>
           <p:cNvSpPr/>
           <p:nvPr/>
         </p:nvSpPr>
@@ -5141,7 +5165,7 @@
       </p:sp>
       <p:sp>
         <p:nvSpPr>
-          <p:cNvPr id="31" name="Oval 30"/>
+          <p:cNvPr id="32" name="Oval 31"/>
           <p:cNvSpPr/>
           <p:nvPr/>
         </p:nvSpPr>

--- a/templates/carousels/field-notes.pptx
+++ b/templates/carousels/field-notes.pptx
@@ -4921,7 +4921,7 @@
       </p:sp>
       <p:pic>
         <p:nvPicPr>
-          <p:cNvPr id="26" name="Picture 25" descr="st9004932392259562121.png"/>
+          <p:cNvPr id="26" name="Picture 25" descr="st2071964333694664066.png"/>
           <p:cNvPicPr>
             <a:picLocks noChangeAspect="1"/>
           </p:cNvPicPr>

--- a/templates/carousels/field-notes.pptx
+++ b/templates/carousels/field-notes.pptx
@@ -3859,7 +3859,7 @@
     <p:bg>
       <p:bgPr>
         <a:solidFill>
-          <a:srgbClr val="F4F1EA"/>
+          <a:srgbClr val="F3F1EA"/>
         </a:solidFill>
         <a:effectLst/>
       </p:bgPr>
@@ -3886,7 +3886,7 @@
             <a:avLst/>
           </a:prstGeom>
           <a:solidFill>
-            <a:srgbClr val="A7B097"/>
+            <a:srgbClr val="B1BCB1"/>
           </a:solidFill>
           <a:ln>
             <a:noFill/>
@@ -3930,7 +3930,7 @@
             <a:avLst/>
           </a:prstGeom>
           <a:solidFill>
-            <a:srgbClr val="A7B097"/>
+            <a:srgbClr val="B1BCB1"/>
           </a:solidFill>
           <a:ln>
             <a:noFill/>
@@ -3974,7 +3974,7 @@
             <a:avLst/>
           </a:prstGeom>
           <a:solidFill>
-            <a:srgbClr val="A7B097"/>
+            <a:srgbClr val="B1BCB1"/>
           </a:solidFill>
           <a:ln>
             <a:noFill/>
@@ -4018,7 +4018,7 @@
             <a:avLst/>
           </a:prstGeom>
           <a:solidFill>
-            <a:srgbClr val="A7B097"/>
+            <a:srgbClr val="B1BCB1"/>
           </a:solidFill>
           <a:ln>
             <a:noFill/>
@@ -4062,7 +4062,7 @@
             <a:avLst/>
           </a:prstGeom>
           <a:solidFill>
-            <a:srgbClr val="A7B097"/>
+            <a:srgbClr val="B1BCB1"/>
           </a:solidFill>
           <a:ln>
             <a:noFill/>
@@ -4106,7 +4106,7 @@
             <a:avLst/>
           </a:prstGeom>
           <a:solidFill>
-            <a:srgbClr val="A7B097"/>
+            <a:srgbClr val="B1BCB1"/>
           </a:solidFill>
           <a:ln>
             <a:noFill/>
@@ -4150,7 +4150,7 @@
             <a:avLst/>
           </a:prstGeom>
           <a:solidFill>
-            <a:srgbClr val="A7B097"/>
+            <a:srgbClr val="B1BCB1"/>
           </a:solidFill>
           <a:ln>
             <a:noFill/>
@@ -4194,7 +4194,7 @@
             <a:avLst/>
           </a:prstGeom>
           <a:solidFill>
-            <a:srgbClr val="A7B097"/>
+            <a:srgbClr val="B1BCB1"/>
           </a:solidFill>
           <a:ln>
             <a:noFill/>
@@ -4238,7 +4238,7 @@
             <a:avLst/>
           </a:prstGeom>
           <a:solidFill>
-            <a:srgbClr val="A7B097"/>
+            <a:srgbClr val="B1BCB1"/>
           </a:solidFill>
           <a:ln>
             <a:noFill/>
@@ -4282,7 +4282,7 @@
             <a:avLst/>
           </a:prstGeom>
           <a:solidFill>
-            <a:srgbClr val="A7B097"/>
+            <a:srgbClr val="B1BCB1"/>
           </a:solidFill>
           <a:ln>
             <a:noFill/>
@@ -4326,7 +4326,7 @@
             <a:avLst/>
           </a:prstGeom>
           <a:solidFill>
-            <a:srgbClr val="A7B097"/>
+            <a:srgbClr val="B1BCB1"/>
           </a:solidFill>
           <a:ln>
             <a:noFill/>
@@ -4370,7 +4370,7 @@
             <a:avLst/>
           </a:prstGeom>
           <a:solidFill>
-            <a:srgbClr val="A7B097"/>
+            <a:srgbClr val="B1BCB1"/>
           </a:solidFill>
           <a:ln>
             <a:noFill/>
@@ -4414,7 +4414,7 @@
             <a:avLst/>
           </a:prstGeom>
           <a:solidFill>
-            <a:srgbClr val="A7B097"/>
+            <a:srgbClr val="B1BCB1"/>
           </a:solidFill>
           <a:ln>
             <a:noFill/>
@@ -4458,7 +4458,7 @@
             <a:avLst/>
           </a:prstGeom>
           <a:solidFill>
-            <a:srgbClr val="A7B097"/>
+            <a:srgbClr val="B1BCB1"/>
           </a:solidFill>
           <a:ln>
             <a:noFill/>
@@ -4502,7 +4502,7 @@
             <a:avLst/>
           </a:prstGeom>
           <a:solidFill>
-            <a:srgbClr val="A7B097"/>
+            <a:srgbClr val="B1BCB1"/>
           </a:solidFill>
           <a:ln>
             <a:noFill/>
@@ -4546,7 +4546,7 @@
             <a:avLst/>
           </a:prstGeom>
           <a:solidFill>
-            <a:srgbClr val="A7B097"/>
+            <a:srgbClr val="B1BCB1"/>
           </a:solidFill>
           <a:ln>
             <a:noFill/>
@@ -4590,7 +4590,7 @@
             <a:avLst/>
           </a:prstGeom>
           <a:solidFill>
-            <a:srgbClr val="A7B097"/>
+            <a:srgbClr val="B1BCB1"/>
           </a:solidFill>
           <a:ln>
             <a:noFill/>
@@ -4634,7 +4634,7 @@
             <a:avLst/>
           </a:prstGeom>
           <a:solidFill>
-            <a:srgbClr val="A7B097"/>
+            <a:srgbClr val="B1BCB1"/>
           </a:solidFill>
           <a:ln>
             <a:noFill/>
@@ -4678,7 +4678,7 @@
             <a:avLst/>
           </a:prstGeom>
           <a:solidFill>
-            <a:srgbClr val="A7B097"/>
+            <a:srgbClr val="B1BCB1"/>
           </a:solidFill>
           <a:ln>
             <a:noFill/>
@@ -4722,7 +4722,7 @@
             <a:avLst/>
           </a:prstGeom>
           <a:solidFill>
-            <a:srgbClr val="A7B097"/>
+            <a:srgbClr val="B1BCB1"/>
           </a:solidFill>
           <a:ln>
             <a:noFill/>
@@ -4777,7 +4777,7 @@
             <a:r>
               <a:rPr sz="3000" b="1" i="0">
                 <a:solidFill>
-                  <a:srgbClr val="156826"/>
+                  <a:srgbClr val="31662F"/>
                 </a:solidFill>
                 <a:latin typeface="Montserrat"/>
               </a:rPr>
@@ -4789,7 +4789,7 @@
             <a:r>
               <a:rPr sz="3000" b="1" i="0">
                 <a:solidFill>
-                  <a:srgbClr val="156826"/>
+                  <a:srgbClr val="31662F"/>
                 </a:solidFill>
                 <a:latin typeface="Montserrat"/>
               </a:rPr>
@@ -4824,7 +4824,7 @@
             <a:r>
               <a:rPr sz="3000" b="1" i="0">
                 <a:solidFill>
-                  <a:srgbClr val="156826"/>
+                  <a:srgbClr val="31662F"/>
                 </a:solidFill>
                 <a:latin typeface="Montserrat"/>
               </a:rPr>
@@ -4863,7 +4863,7 @@
             <a:r>
               <a:rPr sz="5700" b="1" i="0">
                 <a:solidFill>
-                  <a:srgbClr val="22371F"/>
+                  <a:srgbClr val="1E3F1D"/>
                 </a:solidFill>
                 <a:latin typeface="Montserrat"/>
               </a:rPr>
@@ -4898,7 +4898,7 @@
             <a:r>
               <a:rPr sz="5700" b="0" i="1">
                 <a:solidFill>
-                  <a:srgbClr val="156826"/>
+                  <a:srgbClr val="31662F"/>
                 </a:solidFill>
                 <a:latin typeface="EB Garamond"/>
               </a:rPr>
@@ -4910,7 +4910,7 @@
             <a:r>
               <a:rPr sz="5700" b="0" i="1">
                 <a:solidFill>
-                  <a:srgbClr val="156826"/>
+                  <a:srgbClr val="31662F"/>
                 </a:solidFill>
                 <a:latin typeface="EB Garamond"/>
               </a:rPr>
@@ -4921,7 +4921,7 @@
       </p:sp>
       <p:pic>
         <p:nvPicPr>
-          <p:cNvPr id="26" name="Picture 25" descr="st2071964333694664066.png"/>
+          <p:cNvPr id="26" name="Picture 25" descr="st5027811336302456086.png"/>
           <p:cNvPicPr>
             <a:picLocks noChangeAspect="1"/>
           </p:cNvPicPr>
@@ -4958,7 +4958,7 @@
             <a:avLst/>
           </a:prstGeom>
           <a:solidFill>
-            <a:srgbClr val="156826"/>
+            <a:srgbClr val="31662F"/>
           </a:solidFill>
           <a:ln>
             <a:noFill/>
@@ -5002,7 +5002,7 @@
             <a:avLst/>
           </a:prstGeom>
           <a:solidFill>
-            <a:srgbClr val="A7B097"/>
+            <a:srgbClr val="B1BCB1"/>
           </a:solidFill>
           <a:ln>
             <a:noFill/>
@@ -5046,7 +5046,7 @@
             <a:avLst/>
           </a:prstGeom>
           <a:solidFill>
-            <a:srgbClr val="A7B097"/>
+            <a:srgbClr val="B1BCB1"/>
           </a:solidFill>
           <a:ln>
             <a:noFill/>
@@ -5090,7 +5090,7 @@
             <a:avLst/>
           </a:prstGeom>
           <a:solidFill>
-            <a:srgbClr val="A7B097"/>
+            <a:srgbClr val="B1BCB1"/>
           </a:solidFill>
           <a:ln>
             <a:noFill/>
@@ -5134,7 +5134,7 @@
             <a:avLst/>
           </a:prstGeom>
           <a:solidFill>
-            <a:srgbClr val="A7B097"/>
+            <a:srgbClr val="B1BCB1"/>
           </a:solidFill>
           <a:ln>
             <a:noFill/>
@@ -5178,7 +5178,7 @@
             <a:avLst/>
           </a:prstGeom>
           <a:solidFill>
-            <a:srgbClr val="A7B097"/>
+            <a:srgbClr val="B1BCB1"/>
           </a:solidFill>
           <a:ln>
             <a:noFill/>
@@ -5221,7 +5221,7 @@
     <p:bg>
       <p:bgPr>
         <a:solidFill>
-          <a:srgbClr val="F4F1EA"/>
+          <a:srgbClr val="F3F1EA"/>
         </a:solidFill>
         <a:effectLst/>
       </p:bgPr>
@@ -5248,7 +5248,7 @@
             <a:avLst/>
           </a:prstGeom>
           <a:solidFill>
-            <a:srgbClr val="A7B097"/>
+            <a:srgbClr val="B1BCB1"/>
           </a:solidFill>
           <a:ln>
             <a:noFill/>
@@ -5292,7 +5292,7 @@
             <a:avLst/>
           </a:prstGeom>
           <a:solidFill>
-            <a:srgbClr val="A7B097"/>
+            <a:srgbClr val="B1BCB1"/>
           </a:solidFill>
           <a:ln>
             <a:noFill/>
@@ -5336,7 +5336,7 @@
             <a:avLst/>
           </a:prstGeom>
           <a:solidFill>
-            <a:srgbClr val="A7B097"/>
+            <a:srgbClr val="B1BCB1"/>
           </a:solidFill>
           <a:ln>
             <a:noFill/>
@@ -5380,7 +5380,7 @@
             <a:avLst/>
           </a:prstGeom>
           <a:solidFill>
-            <a:srgbClr val="A7B097"/>
+            <a:srgbClr val="B1BCB1"/>
           </a:solidFill>
           <a:ln>
             <a:noFill/>
@@ -5424,7 +5424,7 @@
             <a:avLst/>
           </a:prstGeom>
           <a:solidFill>
-            <a:srgbClr val="A7B097"/>
+            <a:srgbClr val="B1BCB1"/>
           </a:solidFill>
           <a:ln>
             <a:noFill/>
@@ -5468,7 +5468,7 @@
             <a:avLst/>
           </a:prstGeom>
           <a:solidFill>
-            <a:srgbClr val="A7B097"/>
+            <a:srgbClr val="B1BCB1"/>
           </a:solidFill>
           <a:ln>
             <a:noFill/>
@@ -5512,7 +5512,7 @@
             <a:avLst/>
           </a:prstGeom>
           <a:solidFill>
-            <a:srgbClr val="A7B097"/>
+            <a:srgbClr val="B1BCB1"/>
           </a:solidFill>
           <a:ln>
             <a:noFill/>
@@ -5556,7 +5556,7 @@
             <a:avLst/>
           </a:prstGeom>
           <a:solidFill>
-            <a:srgbClr val="A7B097"/>
+            <a:srgbClr val="B1BCB1"/>
           </a:solidFill>
           <a:ln>
             <a:noFill/>
@@ -5600,7 +5600,7 @@
             <a:avLst/>
           </a:prstGeom>
           <a:solidFill>
-            <a:srgbClr val="A7B097"/>
+            <a:srgbClr val="B1BCB1"/>
           </a:solidFill>
           <a:ln>
             <a:noFill/>
@@ -5644,7 +5644,7 @@
             <a:avLst/>
           </a:prstGeom>
           <a:solidFill>
-            <a:srgbClr val="A7B097"/>
+            <a:srgbClr val="B1BCB1"/>
           </a:solidFill>
           <a:ln>
             <a:noFill/>
@@ -5688,7 +5688,7 @@
             <a:avLst/>
           </a:prstGeom>
           <a:solidFill>
-            <a:srgbClr val="A7B097"/>
+            <a:srgbClr val="B1BCB1"/>
           </a:solidFill>
           <a:ln>
             <a:noFill/>
@@ -5732,7 +5732,7 @@
             <a:avLst/>
           </a:prstGeom>
           <a:solidFill>
-            <a:srgbClr val="A7B097"/>
+            <a:srgbClr val="B1BCB1"/>
           </a:solidFill>
           <a:ln>
             <a:noFill/>
@@ -5776,7 +5776,7 @@
             <a:avLst/>
           </a:prstGeom>
           <a:solidFill>
-            <a:srgbClr val="A7B097"/>
+            <a:srgbClr val="B1BCB1"/>
           </a:solidFill>
           <a:ln>
             <a:noFill/>
@@ -5820,7 +5820,7 @@
             <a:avLst/>
           </a:prstGeom>
           <a:solidFill>
-            <a:srgbClr val="A7B097"/>
+            <a:srgbClr val="B1BCB1"/>
           </a:solidFill>
           <a:ln>
             <a:noFill/>
@@ -5864,7 +5864,7 @@
             <a:avLst/>
           </a:prstGeom>
           <a:solidFill>
-            <a:srgbClr val="A7B097"/>
+            <a:srgbClr val="B1BCB1"/>
           </a:solidFill>
           <a:ln>
             <a:noFill/>
@@ -5908,7 +5908,7 @@
             <a:avLst/>
           </a:prstGeom>
           <a:solidFill>
-            <a:srgbClr val="A7B097"/>
+            <a:srgbClr val="B1BCB1"/>
           </a:solidFill>
           <a:ln>
             <a:noFill/>
@@ -5952,7 +5952,7 @@
             <a:avLst/>
           </a:prstGeom>
           <a:solidFill>
-            <a:srgbClr val="A7B097"/>
+            <a:srgbClr val="B1BCB1"/>
           </a:solidFill>
           <a:ln>
             <a:noFill/>
@@ -5996,7 +5996,7 @@
             <a:avLst/>
           </a:prstGeom>
           <a:solidFill>
-            <a:srgbClr val="A7B097"/>
+            <a:srgbClr val="B1BCB1"/>
           </a:solidFill>
           <a:ln>
             <a:noFill/>
@@ -6040,7 +6040,7 @@
             <a:avLst/>
           </a:prstGeom>
           <a:solidFill>
-            <a:srgbClr val="A7B097"/>
+            <a:srgbClr val="B1BCB1"/>
           </a:solidFill>
           <a:ln>
             <a:noFill/>
@@ -6084,7 +6084,7 @@
             <a:avLst/>
           </a:prstGeom>
           <a:solidFill>
-            <a:srgbClr val="A7B097"/>
+            <a:srgbClr val="B1BCB1"/>
           </a:solidFill>
           <a:ln>
             <a:noFill/>
@@ -6139,7 +6139,7 @@
             <a:r>
               <a:rPr sz="3000" b="1" i="0">
                 <a:solidFill>
-                  <a:srgbClr val="156826"/>
+                  <a:srgbClr val="31662F"/>
                 </a:solidFill>
                 <a:latin typeface="Montserrat"/>
               </a:rPr>
@@ -6151,7 +6151,7 @@
             <a:r>
               <a:rPr sz="3000" b="1" i="0">
                 <a:solidFill>
-                  <a:srgbClr val="156826"/>
+                  <a:srgbClr val="31662F"/>
                 </a:solidFill>
                 <a:latin typeface="Montserrat"/>
               </a:rPr>
@@ -6186,7 +6186,7 @@
             <a:r>
               <a:rPr sz="3000" b="1" i="0">
                 <a:solidFill>
-                  <a:srgbClr val="156826"/>
+                  <a:srgbClr val="31662F"/>
                 </a:solidFill>
                 <a:latin typeface="Montserrat"/>
               </a:rPr>
@@ -6225,7 +6225,7 @@
             <a:r>
               <a:rPr sz="5700" b="0" i="0">
                 <a:solidFill>
-                  <a:srgbClr val="22371F"/>
+                  <a:srgbClr val="1E3F1D"/>
                 </a:solidFill>
                 <a:latin typeface="EB Garamond"/>
               </a:rPr>
@@ -6249,7 +6249,7 @@
             <a:avLst/>
           </a:prstGeom>
           <a:solidFill>
-            <a:srgbClr val="A7B097"/>
+            <a:srgbClr val="B1BCB1"/>
           </a:solidFill>
           <a:ln>
             <a:noFill/>
@@ -6293,7 +6293,7 @@
             <a:avLst/>
           </a:prstGeom>
           <a:solidFill>
-            <a:srgbClr val="156826"/>
+            <a:srgbClr val="31662F"/>
           </a:solidFill>
           <a:ln>
             <a:noFill/>
@@ -6337,7 +6337,7 @@
             <a:avLst/>
           </a:prstGeom>
           <a:solidFill>
-            <a:srgbClr val="A7B097"/>
+            <a:srgbClr val="B1BCB1"/>
           </a:solidFill>
           <a:ln>
             <a:noFill/>
@@ -6381,7 +6381,7 @@
             <a:avLst/>
           </a:prstGeom>
           <a:solidFill>
-            <a:srgbClr val="A7B097"/>
+            <a:srgbClr val="B1BCB1"/>
           </a:solidFill>
           <a:ln>
             <a:noFill/>
@@ -6425,7 +6425,7 @@
             <a:avLst/>
           </a:prstGeom>
           <a:solidFill>
-            <a:srgbClr val="A7B097"/>
+            <a:srgbClr val="B1BCB1"/>
           </a:solidFill>
           <a:ln>
             <a:noFill/>
@@ -6469,7 +6469,7 @@
             <a:avLst/>
           </a:prstGeom>
           <a:solidFill>
-            <a:srgbClr val="A7B097"/>
+            <a:srgbClr val="B1BCB1"/>
           </a:solidFill>
           <a:ln>
             <a:noFill/>
@@ -6512,7 +6512,7 @@
     <p:bg>
       <p:bgPr>
         <a:solidFill>
-          <a:srgbClr val="F4F1EA"/>
+          <a:srgbClr val="F3F1EA"/>
         </a:solidFill>
         <a:effectLst/>
       </p:bgPr>
@@ -6539,7 +6539,7 @@
             <a:avLst/>
           </a:prstGeom>
           <a:solidFill>
-            <a:srgbClr val="A7B097"/>
+            <a:srgbClr val="B1BCB1"/>
           </a:solidFill>
           <a:ln>
             <a:noFill/>
@@ -6583,7 +6583,7 @@
             <a:avLst/>
           </a:prstGeom>
           <a:solidFill>
-            <a:srgbClr val="A7B097"/>
+            <a:srgbClr val="B1BCB1"/>
           </a:solidFill>
           <a:ln>
             <a:noFill/>
@@ -6627,7 +6627,7 @@
             <a:avLst/>
           </a:prstGeom>
           <a:solidFill>
-            <a:srgbClr val="A7B097"/>
+            <a:srgbClr val="B1BCB1"/>
           </a:solidFill>
           <a:ln>
             <a:noFill/>
@@ -6671,7 +6671,7 @@
             <a:avLst/>
           </a:prstGeom>
           <a:solidFill>
-            <a:srgbClr val="A7B097"/>
+            <a:srgbClr val="B1BCB1"/>
           </a:solidFill>
           <a:ln>
             <a:noFill/>
@@ -6715,7 +6715,7 @@
             <a:avLst/>
           </a:prstGeom>
           <a:solidFill>
-            <a:srgbClr val="A7B097"/>
+            <a:srgbClr val="B1BCB1"/>
           </a:solidFill>
           <a:ln>
             <a:noFill/>
@@ -6759,7 +6759,7 @@
             <a:avLst/>
           </a:prstGeom>
           <a:solidFill>
-            <a:srgbClr val="A7B097"/>
+            <a:srgbClr val="B1BCB1"/>
           </a:solidFill>
           <a:ln>
             <a:noFill/>
@@ -6803,7 +6803,7 @@
             <a:avLst/>
           </a:prstGeom>
           <a:solidFill>
-            <a:srgbClr val="A7B097"/>
+            <a:srgbClr val="B1BCB1"/>
           </a:solidFill>
           <a:ln>
             <a:noFill/>
@@ -6847,7 +6847,7 @@
             <a:avLst/>
           </a:prstGeom>
           <a:solidFill>
-            <a:srgbClr val="A7B097"/>
+            <a:srgbClr val="B1BCB1"/>
           </a:solidFill>
           <a:ln>
             <a:noFill/>
@@ -6891,7 +6891,7 @@
             <a:avLst/>
           </a:prstGeom>
           <a:solidFill>
-            <a:srgbClr val="A7B097"/>
+            <a:srgbClr val="B1BCB1"/>
           </a:solidFill>
           <a:ln>
             <a:noFill/>
@@ -6935,7 +6935,7 @@
             <a:avLst/>
           </a:prstGeom>
           <a:solidFill>
-            <a:srgbClr val="A7B097"/>
+            <a:srgbClr val="B1BCB1"/>
           </a:solidFill>
           <a:ln>
             <a:noFill/>
@@ -6979,7 +6979,7 @@
             <a:avLst/>
           </a:prstGeom>
           <a:solidFill>
-            <a:srgbClr val="A7B097"/>
+            <a:srgbClr val="B1BCB1"/>
           </a:solidFill>
           <a:ln>
             <a:noFill/>
@@ -7023,7 +7023,7 @@
             <a:avLst/>
           </a:prstGeom>
           <a:solidFill>
-            <a:srgbClr val="A7B097"/>
+            <a:srgbClr val="B1BCB1"/>
           </a:solidFill>
           <a:ln>
             <a:noFill/>
@@ -7067,7 +7067,7 @@
             <a:avLst/>
           </a:prstGeom>
           <a:solidFill>
-            <a:srgbClr val="A7B097"/>
+            <a:srgbClr val="B1BCB1"/>
           </a:solidFill>
           <a:ln>
             <a:noFill/>
@@ -7111,7 +7111,7 @@
             <a:avLst/>
           </a:prstGeom>
           <a:solidFill>
-            <a:srgbClr val="A7B097"/>
+            <a:srgbClr val="B1BCB1"/>
           </a:solidFill>
           <a:ln>
             <a:noFill/>
@@ -7155,7 +7155,7 @@
             <a:avLst/>
           </a:prstGeom>
           <a:solidFill>
-            <a:srgbClr val="A7B097"/>
+            <a:srgbClr val="B1BCB1"/>
           </a:solidFill>
           <a:ln>
             <a:noFill/>
@@ -7199,7 +7199,7 @@
             <a:avLst/>
           </a:prstGeom>
           <a:solidFill>
-            <a:srgbClr val="A7B097"/>
+            <a:srgbClr val="B1BCB1"/>
           </a:solidFill>
           <a:ln>
             <a:noFill/>
@@ -7243,7 +7243,7 @@
             <a:avLst/>
           </a:prstGeom>
           <a:solidFill>
-            <a:srgbClr val="A7B097"/>
+            <a:srgbClr val="B1BCB1"/>
           </a:solidFill>
           <a:ln>
             <a:noFill/>
@@ -7287,7 +7287,7 @@
             <a:avLst/>
           </a:prstGeom>
           <a:solidFill>
-            <a:srgbClr val="A7B097"/>
+            <a:srgbClr val="B1BCB1"/>
           </a:solidFill>
           <a:ln>
             <a:noFill/>
@@ -7331,7 +7331,7 @@
             <a:avLst/>
           </a:prstGeom>
           <a:solidFill>
-            <a:srgbClr val="A7B097"/>
+            <a:srgbClr val="B1BCB1"/>
           </a:solidFill>
           <a:ln>
             <a:noFill/>
@@ -7375,7 +7375,7 @@
             <a:avLst/>
           </a:prstGeom>
           <a:solidFill>
-            <a:srgbClr val="A7B097"/>
+            <a:srgbClr val="B1BCB1"/>
           </a:solidFill>
           <a:ln>
             <a:noFill/>
@@ -7430,7 +7430,7 @@
             <a:r>
               <a:rPr sz="3000" b="1" i="0">
                 <a:solidFill>
-                  <a:srgbClr val="156826"/>
+                  <a:srgbClr val="31662F"/>
                 </a:solidFill>
                 <a:latin typeface="Montserrat"/>
               </a:rPr>
@@ -7442,7 +7442,7 @@
             <a:r>
               <a:rPr sz="3000" b="1" i="0">
                 <a:solidFill>
-                  <a:srgbClr val="156826"/>
+                  <a:srgbClr val="31662F"/>
                 </a:solidFill>
                 <a:latin typeface="Montserrat"/>
               </a:rPr>
@@ -7477,7 +7477,7 @@
             <a:r>
               <a:rPr sz="3000" b="1" i="0">
                 <a:solidFill>
-                  <a:srgbClr val="156826"/>
+                  <a:srgbClr val="31662F"/>
                 </a:solidFill>
                 <a:latin typeface="Montserrat"/>
               </a:rPr>
@@ -7512,7 +7512,7 @@
             <a:r>
               <a:rPr sz="5400" b="1" i="0">
                 <a:solidFill>
-                  <a:srgbClr val="156826"/>
+                  <a:srgbClr val="31662F"/>
                 </a:solidFill>
                 <a:latin typeface="Montserrat"/>
               </a:rPr>
@@ -7551,7 +7551,7 @@
             <a:r>
               <a:rPr sz="5700" b="0" i="0">
                 <a:solidFill>
-                  <a:srgbClr val="22371F"/>
+                  <a:srgbClr val="1E3F1D"/>
                 </a:solidFill>
                 <a:latin typeface="EB Garamond"/>
               </a:rPr>
@@ -7586,7 +7586,7 @@
             <a:r>
               <a:rPr sz="5400" b="1" i="0">
                 <a:solidFill>
-                  <a:srgbClr val="156826"/>
+                  <a:srgbClr val="31662F"/>
                 </a:solidFill>
                 <a:latin typeface="Montserrat"/>
               </a:rPr>
@@ -7625,7 +7625,7 @@
             <a:r>
               <a:rPr sz="5700" b="0" i="0">
                 <a:solidFill>
-                  <a:srgbClr val="22371F"/>
+                  <a:srgbClr val="1E3F1D"/>
                 </a:solidFill>
                 <a:latin typeface="EB Garamond"/>
               </a:rPr>
@@ -7660,7 +7660,7 @@
             <a:r>
               <a:rPr sz="5400" b="1" i="0">
                 <a:solidFill>
-                  <a:srgbClr val="156826"/>
+                  <a:srgbClr val="31662F"/>
                 </a:solidFill>
                 <a:latin typeface="Montserrat"/>
               </a:rPr>
@@ -7699,7 +7699,7 @@
             <a:r>
               <a:rPr sz="5700" b="0" i="0">
                 <a:solidFill>
-                  <a:srgbClr val="22371F"/>
+                  <a:srgbClr val="1E3F1D"/>
                 </a:solidFill>
                 <a:latin typeface="EB Garamond"/>
               </a:rPr>
@@ -7723,7 +7723,7 @@
             <a:avLst/>
           </a:prstGeom>
           <a:solidFill>
-            <a:srgbClr val="A7B097"/>
+            <a:srgbClr val="B1BCB1"/>
           </a:solidFill>
           <a:ln>
             <a:noFill/>
@@ -7767,7 +7767,7 @@
             <a:avLst/>
           </a:prstGeom>
           <a:solidFill>
-            <a:srgbClr val="A7B097"/>
+            <a:srgbClr val="B1BCB1"/>
           </a:solidFill>
           <a:ln>
             <a:noFill/>
@@ -7811,7 +7811,7 @@
             <a:avLst/>
           </a:prstGeom>
           <a:solidFill>
-            <a:srgbClr val="156826"/>
+            <a:srgbClr val="31662F"/>
           </a:solidFill>
           <a:ln>
             <a:noFill/>
@@ -7855,7 +7855,7 @@
             <a:avLst/>
           </a:prstGeom>
           <a:solidFill>
-            <a:srgbClr val="A7B097"/>
+            <a:srgbClr val="B1BCB1"/>
           </a:solidFill>
           <a:ln>
             <a:noFill/>
@@ -7899,7 +7899,7 @@
             <a:avLst/>
           </a:prstGeom>
           <a:solidFill>
-            <a:srgbClr val="A7B097"/>
+            <a:srgbClr val="B1BCB1"/>
           </a:solidFill>
           <a:ln>
             <a:noFill/>
@@ -7943,7 +7943,7 @@
             <a:avLst/>
           </a:prstGeom>
           <a:solidFill>
-            <a:srgbClr val="A7B097"/>
+            <a:srgbClr val="B1BCB1"/>
           </a:solidFill>
           <a:ln>
             <a:noFill/>
@@ -7986,7 +7986,7 @@
     <p:bg>
       <p:bgPr>
         <a:solidFill>
-          <a:srgbClr val="F4F1EA"/>
+          <a:srgbClr val="F3F1EA"/>
         </a:solidFill>
         <a:effectLst/>
       </p:bgPr>
@@ -8013,7 +8013,7 @@
             <a:avLst/>
           </a:prstGeom>
           <a:solidFill>
-            <a:srgbClr val="A7B097"/>
+            <a:srgbClr val="B1BCB1"/>
           </a:solidFill>
           <a:ln>
             <a:noFill/>
@@ -8057,7 +8057,7 @@
             <a:avLst/>
           </a:prstGeom>
           <a:solidFill>
-            <a:srgbClr val="A7B097"/>
+            <a:srgbClr val="B1BCB1"/>
           </a:solidFill>
           <a:ln>
             <a:noFill/>
@@ -8101,7 +8101,7 @@
             <a:avLst/>
           </a:prstGeom>
           <a:solidFill>
-            <a:srgbClr val="A7B097"/>
+            <a:srgbClr val="B1BCB1"/>
           </a:solidFill>
           <a:ln>
             <a:noFill/>
@@ -8145,7 +8145,7 @@
             <a:avLst/>
           </a:prstGeom>
           <a:solidFill>
-            <a:srgbClr val="A7B097"/>
+            <a:srgbClr val="B1BCB1"/>
           </a:solidFill>
           <a:ln>
             <a:noFill/>
@@ -8189,7 +8189,7 @@
             <a:avLst/>
           </a:prstGeom>
           <a:solidFill>
-            <a:srgbClr val="A7B097"/>
+            <a:srgbClr val="B1BCB1"/>
           </a:solidFill>
           <a:ln>
             <a:noFill/>
@@ -8233,7 +8233,7 @@
             <a:avLst/>
           </a:prstGeom>
           <a:solidFill>
-            <a:srgbClr val="A7B097"/>
+            <a:srgbClr val="B1BCB1"/>
           </a:solidFill>
           <a:ln>
             <a:noFill/>
@@ -8277,7 +8277,7 @@
             <a:avLst/>
           </a:prstGeom>
           <a:solidFill>
-            <a:srgbClr val="A7B097"/>
+            <a:srgbClr val="B1BCB1"/>
           </a:solidFill>
           <a:ln>
             <a:noFill/>
@@ -8321,7 +8321,7 @@
             <a:avLst/>
           </a:prstGeom>
           <a:solidFill>
-            <a:srgbClr val="A7B097"/>
+            <a:srgbClr val="B1BCB1"/>
           </a:solidFill>
           <a:ln>
             <a:noFill/>
@@ -8365,7 +8365,7 @@
             <a:avLst/>
           </a:prstGeom>
           <a:solidFill>
-            <a:srgbClr val="A7B097"/>
+            <a:srgbClr val="B1BCB1"/>
           </a:solidFill>
           <a:ln>
             <a:noFill/>
@@ -8409,7 +8409,7 @@
             <a:avLst/>
           </a:prstGeom>
           <a:solidFill>
-            <a:srgbClr val="A7B097"/>
+            <a:srgbClr val="B1BCB1"/>
           </a:solidFill>
           <a:ln>
             <a:noFill/>
@@ -8453,7 +8453,7 @@
             <a:avLst/>
           </a:prstGeom>
           <a:solidFill>
-            <a:srgbClr val="A7B097"/>
+            <a:srgbClr val="B1BCB1"/>
           </a:solidFill>
           <a:ln>
             <a:noFill/>
@@ -8497,7 +8497,7 @@
             <a:avLst/>
           </a:prstGeom>
           <a:solidFill>
-            <a:srgbClr val="A7B097"/>
+            <a:srgbClr val="B1BCB1"/>
           </a:solidFill>
           <a:ln>
             <a:noFill/>
@@ -8541,7 +8541,7 @@
             <a:avLst/>
           </a:prstGeom>
           <a:solidFill>
-            <a:srgbClr val="A7B097"/>
+            <a:srgbClr val="B1BCB1"/>
           </a:solidFill>
           <a:ln>
             <a:noFill/>
@@ -8585,7 +8585,7 @@
             <a:avLst/>
           </a:prstGeom>
           <a:solidFill>
-            <a:srgbClr val="A7B097"/>
+            <a:srgbClr val="B1BCB1"/>
           </a:solidFill>
           <a:ln>
             <a:noFill/>
@@ -8629,7 +8629,7 @@
             <a:avLst/>
           </a:prstGeom>
           <a:solidFill>
-            <a:srgbClr val="A7B097"/>
+            <a:srgbClr val="B1BCB1"/>
           </a:solidFill>
           <a:ln>
             <a:noFill/>
@@ -8673,7 +8673,7 @@
             <a:avLst/>
           </a:prstGeom>
           <a:solidFill>
-            <a:srgbClr val="A7B097"/>
+            <a:srgbClr val="B1BCB1"/>
           </a:solidFill>
           <a:ln>
             <a:noFill/>
@@ -8717,7 +8717,7 @@
             <a:avLst/>
           </a:prstGeom>
           <a:solidFill>
-            <a:srgbClr val="A7B097"/>
+            <a:srgbClr val="B1BCB1"/>
           </a:solidFill>
           <a:ln>
             <a:noFill/>
@@ -8761,7 +8761,7 @@
             <a:avLst/>
           </a:prstGeom>
           <a:solidFill>
-            <a:srgbClr val="A7B097"/>
+            <a:srgbClr val="B1BCB1"/>
           </a:solidFill>
           <a:ln>
             <a:noFill/>
@@ -8805,7 +8805,7 @@
             <a:avLst/>
           </a:prstGeom>
           <a:solidFill>
-            <a:srgbClr val="A7B097"/>
+            <a:srgbClr val="B1BCB1"/>
           </a:solidFill>
           <a:ln>
             <a:noFill/>
@@ -8849,7 +8849,7 @@
             <a:avLst/>
           </a:prstGeom>
           <a:solidFill>
-            <a:srgbClr val="A7B097"/>
+            <a:srgbClr val="B1BCB1"/>
           </a:solidFill>
           <a:ln>
             <a:noFill/>
@@ -8904,7 +8904,7 @@
             <a:r>
               <a:rPr sz="3000" b="1" i="0">
                 <a:solidFill>
-                  <a:srgbClr val="156826"/>
+                  <a:srgbClr val="31662F"/>
                 </a:solidFill>
                 <a:latin typeface="Montserrat"/>
               </a:rPr>
@@ -8916,7 +8916,7 @@
             <a:r>
               <a:rPr sz="3000" b="1" i="0">
                 <a:solidFill>
-                  <a:srgbClr val="156826"/>
+                  <a:srgbClr val="31662F"/>
                 </a:solidFill>
                 <a:latin typeface="Montserrat"/>
               </a:rPr>
@@ -8951,7 +8951,7 @@
             <a:r>
               <a:rPr sz="3000" b="1" i="0">
                 <a:solidFill>
-                  <a:srgbClr val="156826"/>
+                  <a:srgbClr val="31662F"/>
                 </a:solidFill>
                 <a:latin typeface="Montserrat"/>
               </a:rPr>
@@ -8986,7 +8986,7 @@
             <a:r>
               <a:rPr sz="3000" b="1" i="0">
                 <a:solidFill>
-                  <a:srgbClr val="156826"/>
+                  <a:srgbClr val="31662F"/>
                 </a:solidFill>
                 <a:latin typeface="Montserrat"/>
               </a:rPr>
@@ -9021,7 +9021,7 @@
             <a:r>
               <a:rPr sz="7500" b="1" i="0">
                 <a:solidFill>
-                  <a:srgbClr val="156826"/>
+                  <a:srgbClr val="31662F"/>
                 </a:solidFill>
                 <a:latin typeface="Montserrat"/>
               </a:rPr>
@@ -9056,7 +9056,7 @@
             <a:r>
               <a:rPr sz="5700" b="0" i="0">
                 <a:solidFill>
-                  <a:srgbClr val="22371F"/>
+                  <a:srgbClr val="1E3F1D"/>
                 </a:solidFill>
                 <a:latin typeface="EB Garamond"/>
               </a:rPr>
@@ -9080,7 +9080,7 @@
             <a:avLst/>
           </a:prstGeom>
           <a:solidFill>
-            <a:srgbClr val="22371F"/>
+            <a:srgbClr val="1E3F1D"/>
           </a:solidFill>
           <a:ln>
             <a:noFill/>
@@ -9124,7 +9124,7 @@
             <a:avLst/>
           </a:prstGeom>
           <a:solidFill>
-            <a:srgbClr val="A7B097"/>
+            <a:srgbClr val="B1BCB1"/>
           </a:solidFill>
           <a:ln>
             <a:noFill/>
@@ -9168,7 +9168,7 @@
             <a:avLst/>
           </a:prstGeom>
           <a:solidFill>
-            <a:srgbClr val="156826"/>
+            <a:srgbClr val="31662F"/>
           </a:solidFill>
           <a:ln>
             <a:noFill/>
@@ -9223,7 +9223,7 @@
             <a:r>
               <a:rPr sz="3000" b="1" i="0">
                 <a:solidFill>
-                  <a:srgbClr val="22371F"/>
+                  <a:srgbClr val="1E3F1D"/>
                 </a:solidFill>
                 <a:latin typeface="Montserrat"/>
               </a:rPr>
@@ -9258,7 +9258,7 @@
             <a:r>
               <a:rPr sz="3000" b="1" i="0">
                 <a:solidFill>
-                  <a:srgbClr val="22371F"/>
+                  <a:srgbClr val="1E3F1D"/>
                 </a:solidFill>
                 <a:latin typeface="Montserrat"/>
               </a:rPr>
@@ -9317,7 +9317,7 @@
             <a:avLst/>
           </a:prstGeom>
           <a:solidFill>
-            <a:srgbClr val="A7B097"/>
+            <a:srgbClr val="B1BCB1"/>
           </a:solidFill>
           <a:ln>
             <a:noFill/>
@@ -9361,7 +9361,7 @@
             <a:avLst/>
           </a:prstGeom>
           <a:solidFill>
-            <a:srgbClr val="A7B097"/>
+            <a:srgbClr val="B1BCB1"/>
           </a:solidFill>
           <a:ln>
             <a:noFill/>
@@ -9405,7 +9405,7 @@
             <a:avLst/>
           </a:prstGeom>
           <a:solidFill>
-            <a:srgbClr val="A7B097"/>
+            <a:srgbClr val="B1BCB1"/>
           </a:solidFill>
           <a:ln>
             <a:noFill/>
@@ -9449,7 +9449,7 @@
             <a:avLst/>
           </a:prstGeom>
           <a:solidFill>
-            <a:srgbClr val="156826"/>
+            <a:srgbClr val="31662F"/>
           </a:solidFill>
           <a:ln>
             <a:noFill/>
@@ -9493,7 +9493,7 @@
             <a:avLst/>
           </a:prstGeom>
           <a:solidFill>
-            <a:srgbClr val="A7B097"/>
+            <a:srgbClr val="B1BCB1"/>
           </a:solidFill>
           <a:ln>
             <a:noFill/>
@@ -9537,7 +9537,7 @@
             <a:avLst/>
           </a:prstGeom>
           <a:solidFill>
-            <a:srgbClr val="A7B097"/>
+            <a:srgbClr val="B1BCB1"/>
           </a:solidFill>
           <a:ln>
             <a:noFill/>
@@ -9580,7 +9580,7 @@
     <p:bg>
       <p:bgPr>
         <a:solidFill>
-          <a:srgbClr val="F4F1EA"/>
+          <a:srgbClr val="F3F1EA"/>
         </a:solidFill>
         <a:effectLst/>
       </p:bgPr>
@@ -9607,7 +9607,7 @@
             <a:avLst/>
           </a:prstGeom>
           <a:solidFill>
-            <a:srgbClr val="A7B097"/>
+            <a:srgbClr val="B1BCB1"/>
           </a:solidFill>
           <a:ln>
             <a:noFill/>
@@ -9651,7 +9651,7 @@
             <a:avLst/>
           </a:prstGeom>
           <a:solidFill>
-            <a:srgbClr val="A7B097"/>
+            <a:srgbClr val="B1BCB1"/>
           </a:solidFill>
           <a:ln>
             <a:noFill/>
@@ -9695,7 +9695,7 @@
             <a:avLst/>
           </a:prstGeom>
           <a:solidFill>
-            <a:srgbClr val="A7B097"/>
+            <a:srgbClr val="B1BCB1"/>
           </a:solidFill>
           <a:ln>
             <a:noFill/>
@@ -9739,7 +9739,7 @@
             <a:avLst/>
           </a:prstGeom>
           <a:solidFill>
-            <a:srgbClr val="A7B097"/>
+            <a:srgbClr val="B1BCB1"/>
           </a:solidFill>
           <a:ln>
             <a:noFill/>
@@ -9783,7 +9783,7 @@
             <a:avLst/>
           </a:prstGeom>
           <a:solidFill>
-            <a:srgbClr val="A7B097"/>
+            <a:srgbClr val="B1BCB1"/>
           </a:solidFill>
           <a:ln>
             <a:noFill/>
@@ -9827,7 +9827,7 @@
             <a:avLst/>
           </a:prstGeom>
           <a:solidFill>
-            <a:srgbClr val="A7B097"/>
+            <a:srgbClr val="B1BCB1"/>
           </a:solidFill>
           <a:ln>
             <a:noFill/>
@@ -9871,7 +9871,7 @@
             <a:avLst/>
           </a:prstGeom>
           <a:solidFill>
-            <a:srgbClr val="A7B097"/>
+            <a:srgbClr val="B1BCB1"/>
           </a:solidFill>
           <a:ln>
             <a:noFill/>
@@ -9915,7 +9915,7 @@
             <a:avLst/>
           </a:prstGeom>
           <a:solidFill>
-            <a:srgbClr val="A7B097"/>
+            <a:srgbClr val="B1BCB1"/>
           </a:solidFill>
           <a:ln>
             <a:noFill/>
@@ -9959,7 +9959,7 @@
             <a:avLst/>
           </a:prstGeom>
           <a:solidFill>
-            <a:srgbClr val="A7B097"/>
+            <a:srgbClr val="B1BCB1"/>
           </a:solidFill>
           <a:ln>
             <a:noFill/>
@@ -10003,7 +10003,7 @@
             <a:avLst/>
           </a:prstGeom>
           <a:solidFill>
-            <a:srgbClr val="A7B097"/>
+            <a:srgbClr val="B1BCB1"/>
           </a:solidFill>
           <a:ln>
             <a:noFill/>
@@ -10047,7 +10047,7 @@
             <a:avLst/>
           </a:prstGeom>
           <a:solidFill>
-            <a:srgbClr val="A7B097"/>
+            <a:srgbClr val="B1BCB1"/>
           </a:solidFill>
           <a:ln>
             <a:noFill/>
@@ -10091,7 +10091,7 @@
             <a:avLst/>
           </a:prstGeom>
           <a:solidFill>
-            <a:srgbClr val="A7B097"/>
+            <a:srgbClr val="B1BCB1"/>
           </a:solidFill>
           <a:ln>
             <a:noFill/>
@@ -10135,7 +10135,7 @@
             <a:avLst/>
           </a:prstGeom>
           <a:solidFill>
-            <a:srgbClr val="A7B097"/>
+            <a:srgbClr val="B1BCB1"/>
           </a:solidFill>
           <a:ln>
             <a:noFill/>
@@ -10179,7 +10179,7 @@
             <a:avLst/>
           </a:prstGeom>
           <a:solidFill>
-            <a:srgbClr val="A7B097"/>
+            <a:srgbClr val="B1BCB1"/>
           </a:solidFill>
           <a:ln>
             <a:noFill/>
@@ -10223,7 +10223,7 @@
             <a:avLst/>
           </a:prstGeom>
           <a:solidFill>
-            <a:srgbClr val="A7B097"/>
+            <a:srgbClr val="B1BCB1"/>
           </a:solidFill>
           <a:ln>
             <a:noFill/>
@@ -10267,7 +10267,7 @@
             <a:avLst/>
           </a:prstGeom>
           <a:solidFill>
-            <a:srgbClr val="A7B097"/>
+            <a:srgbClr val="B1BCB1"/>
           </a:solidFill>
           <a:ln>
             <a:noFill/>
@@ -10311,7 +10311,7 @@
             <a:avLst/>
           </a:prstGeom>
           <a:solidFill>
-            <a:srgbClr val="A7B097"/>
+            <a:srgbClr val="B1BCB1"/>
           </a:solidFill>
           <a:ln>
             <a:noFill/>
@@ -10355,7 +10355,7 @@
             <a:avLst/>
           </a:prstGeom>
           <a:solidFill>
-            <a:srgbClr val="A7B097"/>
+            <a:srgbClr val="B1BCB1"/>
           </a:solidFill>
           <a:ln>
             <a:noFill/>
@@ -10399,7 +10399,7 @@
             <a:avLst/>
           </a:prstGeom>
           <a:solidFill>
-            <a:srgbClr val="A7B097"/>
+            <a:srgbClr val="B1BCB1"/>
           </a:solidFill>
           <a:ln>
             <a:noFill/>
@@ -10443,7 +10443,7 @@
             <a:avLst/>
           </a:prstGeom>
           <a:solidFill>
-            <a:srgbClr val="A7B097"/>
+            <a:srgbClr val="B1BCB1"/>
           </a:solidFill>
           <a:ln>
             <a:noFill/>
@@ -10498,7 +10498,7 @@
             <a:r>
               <a:rPr sz="3000" b="1" i="0">
                 <a:solidFill>
-                  <a:srgbClr val="156826"/>
+                  <a:srgbClr val="31662F"/>
                 </a:solidFill>
                 <a:latin typeface="Montserrat"/>
               </a:rPr>
@@ -10510,7 +10510,7 @@
             <a:r>
               <a:rPr sz="3000" b="1" i="0">
                 <a:solidFill>
-                  <a:srgbClr val="156826"/>
+                  <a:srgbClr val="31662F"/>
                 </a:solidFill>
                 <a:latin typeface="Montserrat"/>
               </a:rPr>
@@ -10545,7 +10545,7 @@
             <a:r>
               <a:rPr sz="3000" b="1" i="0">
                 <a:solidFill>
-                  <a:srgbClr val="156826"/>
+                  <a:srgbClr val="31662F"/>
                 </a:solidFill>
                 <a:latin typeface="Montserrat"/>
               </a:rPr>
@@ -10584,7 +10584,7 @@
             <a:r>
               <a:rPr sz="5700" b="0" i="0">
                 <a:solidFill>
-                  <a:srgbClr val="22371F"/>
+                  <a:srgbClr val="1E3F1D"/>
                 </a:solidFill>
                 <a:latin typeface="EB Garamond"/>
               </a:rPr>
@@ -10608,7 +10608,7 @@
             <a:avLst/>
           </a:prstGeom>
           <a:solidFill>
-            <a:srgbClr val="A7B097"/>
+            <a:srgbClr val="B1BCB1"/>
           </a:solidFill>
           <a:ln>
             <a:noFill/>
@@ -10652,7 +10652,7 @@
             <a:avLst/>
           </a:prstGeom>
           <a:solidFill>
-            <a:srgbClr val="A7B097"/>
+            <a:srgbClr val="B1BCB1"/>
           </a:solidFill>
           <a:ln>
             <a:noFill/>
@@ -10696,7 +10696,7 @@
             <a:avLst/>
           </a:prstGeom>
           <a:solidFill>
-            <a:srgbClr val="A7B097"/>
+            <a:srgbClr val="B1BCB1"/>
           </a:solidFill>
           <a:ln>
             <a:noFill/>
@@ -10740,7 +10740,7 @@
             <a:avLst/>
           </a:prstGeom>
           <a:solidFill>
-            <a:srgbClr val="A7B097"/>
+            <a:srgbClr val="B1BCB1"/>
           </a:solidFill>
           <a:ln>
             <a:noFill/>
@@ -10784,7 +10784,7 @@
             <a:avLst/>
           </a:prstGeom>
           <a:solidFill>
-            <a:srgbClr val="156826"/>
+            <a:srgbClr val="31662F"/>
           </a:solidFill>
           <a:ln>
             <a:noFill/>
@@ -10828,7 +10828,7 @@
             <a:avLst/>
           </a:prstGeom>
           <a:solidFill>
-            <a:srgbClr val="A7B097"/>
+            <a:srgbClr val="B1BCB1"/>
           </a:solidFill>
           <a:ln>
             <a:noFill/>
@@ -10871,7 +10871,7 @@
     <p:bg>
       <p:bgPr>
         <a:solidFill>
-          <a:srgbClr val="F4F1EA"/>
+          <a:srgbClr val="F3F1EA"/>
         </a:solidFill>
         <a:effectLst/>
       </p:bgPr>
@@ -10898,7 +10898,7 @@
             <a:avLst/>
           </a:prstGeom>
           <a:solidFill>
-            <a:srgbClr val="A7B097"/>
+            <a:srgbClr val="B1BCB1"/>
           </a:solidFill>
           <a:ln>
             <a:noFill/>
@@ -10942,7 +10942,7 @@
             <a:avLst/>
           </a:prstGeom>
           <a:solidFill>
-            <a:srgbClr val="A7B097"/>
+            <a:srgbClr val="B1BCB1"/>
           </a:solidFill>
           <a:ln>
             <a:noFill/>
@@ -10986,7 +10986,7 @@
             <a:avLst/>
           </a:prstGeom>
           <a:solidFill>
-            <a:srgbClr val="A7B097"/>
+            <a:srgbClr val="B1BCB1"/>
           </a:solidFill>
           <a:ln>
             <a:noFill/>
@@ -11030,7 +11030,7 @@
             <a:avLst/>
           </a:prstGeom>
           <a:solidFill>
-            <a:srgbClr val="A7B097"/>
+            <a:srgbClr val="B1BCB1"/>
           </a:solidFill>
           <a:ln>
             <a:noFill/>
@@ -11074,7 +11074,7 @@
             <a:avLst/>
           </a:prstGeom>
           <a:solidFill>
-            <a:srgbClr val="A7B097"/>
+            <a:srgbClr val="B1BCB1"/>
           </a:solidFill>
           <a:ln>
             <a:noFill/>
@@ -11118,7 +11118,7 @@
             <a:avLst/>
           </a:prstGeom>
           <a:solidFill>
-            <a:srgbClr val="A7B097"/>
+            <a:srgbClr val="B1BCB1"/>
           </a:solidFill>
           <a:ln>
             <a:noFill/>
@@ -11162,7 +11162,7 @@
             <a:avLst/>
           </a:prstGeom>
           <a:solidFill>
-            <a:srgbClr val="A7B097"/>
+            <a:srgbClr val="B1BCB1"/>
           </a:solidFill>
           <a:ln>
             <a:noFill/>
@@ -11206,7 +11206,7 @@
             <a:avLst/>
           </a:prstGeom>
           <a:solidFill>
-            <a:srgbClr val="A7B097"/>
+            <a:srgbClr val="B1BCB1"/>
           </a:solidFill>
           <a:ln>
             <a:noFill/>
@@ -11250,7 +11250,7 @@
             <a:avLst/>
           </a:prstGeom>
           <a:solidFill>
-            <a:srgbClr val="A7B097"/>
+            <a:srgbClr val="B1BCB1"/>
           </a:solidFill>
           <a:ln>
             <a:noFill/>
@@ -11294,7 +11294,7 @@
             <a:avLst/>
           </a:prstGeom>
           <a:solidFill>
-            <a:srgbClr val="A7B097"/>
+            <a:srgbClr val="B1BCB1"/>
           </a:solidFill>
           <a:ln>
             <a:noFill/>
@@ -11338,7 +11338,7 @@
             <a:avLst/>
           </a:prstGeom>
           <a:solidFill>
-            <a:srgbClr val="A7B097"/>
+            <a:srgbClr val="B1BCB1"/>
           </a:solidFill>
           <a:ln>
             <a:noFill/>
@@ -11382,7 +11382,7 @@
             <a:avLst/>
           </a:prstGeom>
           <a:solidFill>
-            <a:srgbClr val="A7B097"/>
+            <a:srgbClr val="B1BCB1"/>
           </a:solidFill>
           <a:ln>
             <a:noFill/>
@@ -11426,7 +11426,7 @@
             <a:avLst/>
           </a:prstGeom>
           <a:solidFill>
-            <a:srgbClr val="A7B097"/>
+            <a:srgbClr val="B1BCB1"/>
           </a:solidFill>
           <a:ln>
             <a:noFill/>
@@ -11470,7 +11470,7 @@
             <a:avLst/>
           </a:prstGeom>
           <a:solidFill>
-            <a:srgbClr val="A7B097"/>
+            <a:srgbClr val="B1BCB1"/>
           </a:solidFill>
           <a:ln>
             <a:noFill/>
@@ -11514,7 +11514,7 @@
             <a:avLst/>
           </a:prstGeom>
           <a:solidFill>
-            <a:srgbClr val="A7B097"/>
+            <a:srgbClr val="B1BCB1"/>
           </a:solidFill>
           <a:ln>
             <a:noFill/>
@@ -11558,7 +11558,7 @@
             <a:avLst/>
           </a:prstGeom>
           <a:solidFill>
-            <a:srgbClr val="A7B097"/>
+            <a:srgbClr val="B1BCB1"/>
           </a:solidFill>
           <a:ln>
             <a:noFill/>
@@ -11602,7 +11602,7 @@
             <a:avLst/>
           </a:prstGeom>
           <a:solidFill>
-            <a:srgbClr val="A7B097"/>
+            <a:srgbClr val="B1BCB1"/>
           </a:solidFill>
           <a:ln>
             <a:noFill/>
@@ -11646,7 +11646,7 @@
             <a:avLst/>
           </a:prstGeom>
           <a:solidFill>
-            <a:srgbClr val="A7B097"/>
+            <a:srgbClr val="B1BCB1"/>
           </a:solidFill>
           <a:ln>
             <a:noFill/>
@@ -11690,7 +11690,7 @@
             <a:avLst/>
           </a:prstGeom>
           <a:solidFill>
-            <a:srgbClr val="A7B097"/>
+            <a:srgbClr val="B1BCB1"/>
           </a:solidFill>
           <a:ln>
             <a:noFill/>
@@ -11734,7 +11734,7 @@
             <a:avLst/>
           </a:prstGeom>
           <a:solidFill>
-            <a:srgbClr val="A7B097"/>
+            <a:srgbClr val="B1BCB1"/>
           </a:solidFill>
           <a:ln>
             <a:noFill/>
@@ -11789,7 +11789,7 @@
             <a:r>
               <a:rPr sz="3000" b="1" i="0">
                 <a:solidFill>
-                  <a:srgbClr val="156826"/>
+                  <a:srgbClr val="31662F"/>
                 </a:solidFill>
                 <a:latin typeface="Montserrat"/>
               </a:rPr>
@@ -11801,7 +11801,7 @@
             <a:r>
               <a:rPr sz="3000" b="1" i="0">
                 <a:solidFill>
-                  <a:srgbClr val="156826"/>
+                  <a:srgbClr val="31662F"/>
                 </a:solidFill>
                 <a:latin typeface="Montserrat"/>
               </a:rPr>
@@ -11836,7 +11836,7 @@
             <a:r>
               <a:rPr sz="3000" b="1" i="0">
                 <a:solidFill>
-                  <a:srgbClr val="156826"/>
+                  <a:srgbClr val="31662F"/>
                 </a:solidFill>
                 <a:latin typeface="Montserrat"/>
               </a:rPr>
@@ -11860,7 +11860,7 @@
             <a:avLst/>
           </a:prstGeom>
           <a:solidFill>
-            <a:srgbClr val="A7B097"/>
+            <a:srgbClr val="B1BCB1"/>
           </a:solidFill>
           <a:ln>
             <a:noFill/>
@@ -11915,7 +11915,7 @@
             <a:r>
               <a:rPr sz="3000" b="1" i="0">
                 <a:solidFill>
-                  <a:srgbClr val="22371F"/>
+                  <a:srgbClr val="1E3F1D"/>
                 </a:solidFill>
                 <a:latin typeface="Montserrat"/>
               </a:rPr>
@@ -11954,7 +11954,7 @@
             <a:r>
               <a:rPr sz="3750" b="1" i="0">
                 <a:solidFill>
-                  <a:srgbClr val="22371F"/>
+                  <a:srgbClr val="1E3F1D"/>
                 </a:solidFill>
                 <a:latin typeface="Montserrat"/>
               </a:rPr>
@@ -11970,7 +11970,7 @@
             <a:r>
               <a:rPr sz="3750" b="1" i="0">
                 <a:solidFill>
-                  <a:srgbClr val="22371F"/>
+                  <a:srgbClr val="1E3F1D"/>
                 </a:solidFill>
                 <a:latin typeface="Montserrat"/>
               </a:rPr>
@@ -12009,7 +12009,7 @@
             <a:r>
               <a:rPr sz="5700" b="0" i="0">
                 <a:solidFill>
-                  <a:srgbClr val="22371F"/>
+                  <a:srgbClr val="1E3F1D"/>
                 </a:solidFill>
                 <a:latin typeface="EB Garamond"/>
               </a:rPr>
@@ -12068,7 +12068,7 @@
             <a:avLst/>
           </a:prstGeom>
           <a:solidFill>
-            <a:srgbClr val="A7B097"/>
+            <a:srgbClr val="B1BCB1"/>
           </a:solidFill>
           <a:ln>
             <a:noFill/>
@@ -12112,7 +12112,7 @@
             <a:avLst/>
           </a:prstGeom>
           <a:solidFill>
-            <a:srgbClr val="A7B097"/>
+            <a:srgbClr val="B1BCB1"/>
           </a:solidFill>
           <a:ln>
             <a:noFill/>
@@ -12156,7 +12156,7 @@
             <a:avLst/>
           </a:prstGeom>
           <a:solidFill>
-            <a:srgbClr val="A7B097"/>
+            <a:srgbClr val="B1BCB1"/>
           </a:solidFill>
           <a:ln>
             <a:noFill/>
@@ -12200,7 +12200,7 @@
             <a:avLst/>
           </a:prstGeom>
           <a:solidFill>
-            <a:srgbClr val="A7B097"/>
+            <a:srgbClr val="B1BCB1"/>
           </a:solidFill>
           <a:ln>
             <a:noFill/>
@@ -12244,7 +12244,7 @@
             <a:avLst/>
           </a:prstGeom>
           <a:solidFill>
-            <a:srgbClr val="A7B097"/>
+            <a:srgbClr val="B1BCB1"/>
           </a:solidFill>
           <a:ln>
             <a:noFill/>
@@ -12288,7 +12288,7 @@
             <a:avLst/>
           </a:prstGeom>
           <a:solidFill>
-            <a:srgbClr val="156826"/>
+            <a:srgbClr val="31662F"/>
           </a:solidFill>
           <a:ln>
             <a:noFill/>
